--- a/world.pptx
+++ b/world.pptx
@@ -31,7 +31,7 @@
       </p:grpSpPr>
       <p:sp>
         <p:nvSpPr>
-          <p:cNvPr id="7" name="PlaceHolder 1"/>
+          <p:cNvPr id="6" name="PlaceHolder 1"/>
           <p:cNvSpPr>
             <a:spLocks noGrp="1"/>
           </p:cNvSpPr>
@@ -41,8 +41,8 @@
         </p:nvSpPr>
         <p:spPr>
           <a:xfrm>
-            <a:off x="504000" y="226080"/>
-            <a:ext cx="9071640" cy="946440"/>
+            <a:off x="504000" y="363600"/>
+            <a:ext cx="9071280" cy="670680"/>
           </a:xfrm>
           <a:prstGeom prst="rect">
             <a:avLst/>
@@ -59,6 +59,9 @@
           <a:p>
             <a:pPr indent="0" algn="ctr">
               <a:buNone/>
+              <a:tabLst>
+                <a:tab pos="0" algn="l"/>
+              </a:tabLst>
             </a:pPr>
             <a:endParaRPr lang="en-US" sz="4400" b="0" u="none" strike="noStrike">
               <a:solidFill>
@@ -73,7 +76,7 @@
       </p:sp>
       <p:sp>
         <p:nvSpPr>
-          <p:cNvPr id="8" name="PlaceHolder 2"/>
+          <p:cNvPr id="7" name="PlaceHolder 2"/>
           <p:cNvSpPr>
             <a:spLocks noGrp="1"/>
           </p:cNvSpPr>
@@ -83,8 +86,8 @@
         </p:nvSpPr>
         <p:spPr>
           <a:xfrm>
-            <a:off x="504000" y="1326600"/>
-            <a:ext cx="9071640" cy="3288240"/>
+            <a:off x="504000" y="2726280"/>
+            <a:ext cx="9071280" cy="488160"/>
           </a:xfrm>
           <a:prstGeom prst="rect">
             <a:avLst/>
@@ -104,7 +107,7 @@
             </a:pPr>
             <a:endParaRPr lang="en-US" sz="3200" b="0" u="none" strike="noStrike">
               <a:solidFill>
-                <a:srgbClr val="FFFFFF"/>
+                <a:srgbClr val="000000"/>
               </a:solidFill>
               <a:effectLst/>
               <a:uFillTx/>
@@ -120,7 +123,7 @@
             <a:spLocks noGrp="1"/>
           </p:cNvSpPr>
           <p:nvPr>
-            <p:ph type="ftr" idx="2"/>
+            <p:ph type="ftr" idx="1"/>
           </p:nvPr>
         </p:nvSpPr>
         <p:spPr/>
@@ -140,14 +143,14 @@
             <a:spLocks noGrp="1"/>
           </p:cNvSpPr>
           <p:nvPr>
-            <p:ph type="sldNum" idx="3"/>
+            <p:ph type="sldNum" idx="2"/>
           </p:nvPr>
         </p:nvSpPr>
         <p:spPr/>
         <p:txBody>
           <a:bodyPr/>
           <a:p>
-            <a:fld id="{091D7C93-1BFA-4817-93C6-01F418DDB83A}" type="slidenum">
+            <a:fld id="{77126653-E1B6-4B12-9A5D-E349D6BA0074}" type="slidenum">
               <a:t>&lt;#&gt;</a:t>
             </a:fld>
           </a:p>
@@ -160,7 +163,7 @@
             <a:spLocks noGrp="1"/>
           </p:cNvSpPr>
           <p:nvPr>
-            <p:ph type="dt" idx="1"/>
+            <p:ph type="dt" idx="3"/>
           </p:nvPr>
         </p:nvSpPr>
         <p:spPr/>
@@ -211,8 +214,8 @@
         </p:nvSpPr>
         <p:spPr>
           <a:xfrm>
-            <a:off x="504000" y="226080"/>
-            <a:ext cx="9071640" cy="946440"/>
+            <a:off x="504000" y="363600"/>
+            <a:ext cx="9071280" cy="670680"/>
           </a:xfrm>
           <a:prstGeom prst="rect">
             <a:avLst/>
@@ -224,11 +227,14 @@
         </p:spPr>
         <p:txBody>
           <a:bodyPr lIns="0" tIns="0" rIns="0" bIns="0" anchor="ctr">
-            <a:noAutofit/>
+            <a:spAutoFit/>
           </a:bodyPr>
           <a:lstStyle>
-            <a:lvl1pPr indent="0" algn="ctr">
-              <a:buNone/>
+            <a:lvl1pPr indent="0" algn="l">
+              <a:buNone/>
+              <a:tabLst>
+                <a:tab pos="0" algn="l"/>
+              </a:tabLst>
               <a:defRPr lang="en-US" sz="4400" b="0" u="none" strike="noStrike">
                 <a:solidFill>
                   <a:srgbClr val="FFFFFF"/>
@@ -240,8 +246,11 @@
             </a:lvl1pPr>
           </a:lstStyle>
           <a:p>
-            <a:pPr indent="0" algn="ctr">
-              <a:buNone/>
+            <a:pPr indent="0" algn="l">
+              <a:buNone/>
+              <a:tabLst>
+                <a:tab pos="0" algn="l"/>
+              </a:tabLst>
             </a:pPr>
             <a:r>
               <a:rPr lang="en-US" sz="4400" b="0" u="none" strike="noStrike">
@@ -272,13 +281,13 @@
             <a:spLocks noGrp="1"/>
           </p:cNvSpPr>
           <p:nvPr>
-            <p:ph type="body"/>
+            <p:ph type="ftr" idx="1"/>
           </p:nvPr>
         </p:nvSpPr>
         <p:spPr>
           <a:xfrm>
-            <a:off x="504000" y="1326600"/>
-            <a:ext cx="9071640" cy="3288240"/>
+            <a:off x="3447360" y="5165280"/>
+            <a:ext cx="3194640" cy="390240"/>
           </a:xfrm>
           <a:prstGeom prst="rect">
             <a:avLst/>
@@ -290,367 +299,57 @@
         </p:spPr>
         <p:txBody>
           <a:bodyPr lIns="0" tIns="0" rIns="0" bIns="0" anchor="t">
-            <a:normAutofit/>
+            <a:noAutofit/>
           </a:bodyPr>
           <a:lstStyle>
-            <a:lvl1pPr algn="l">
-              <a:spcBef>
-                <a:spcPts val="1417"/>
-              </a:spcBef>
-              <a:buClr>
-                <a:srgbClr val="FFFFFF"/>
-              </a:buClr>
-              <a:buSzPct val="45000"/>
-              <a:buFont typeface="Wingdings" charset="2"/>
-              <a:buChar char=""/>
-              <a:defRPr lang="en-US" sz="3200" b="0" u="none" strike="noStrike">
+            <a:lvl1pPr indent="0" algn="ctr">
+              <a:lnSpc>
+                <a:spcPct val="100000"/>
+              </a:lnSpc>
+              <a:buNone/>
+              <a:tabLst>
+                <a:tab pos="0" algn="l"/>
+              </a:tabLst>
+              <a:defRPr lang="en-US" sz="1400" b="0" u="none" strike="noStrike">
                 <a:solidFill>
                   <a:srgbClr val="FFFFFF"/>
                 </a:solidFill>
                 <a:effectLst/>
                 <a:uFillTx/>
-                <a:latin typeface="Arial"/>
+                <a:latin typeface="Times New Roman"/>
               </a:defRPr>
             </a:lvl1pPr>
-            <a:lvl2pPr lvl="1" algn="l">
-              <a:spcBef>
-                <a:spcPts val="1134"/>
-              </a:spcBef>
-              <a:buClr>
-                <a:srgbClr val="FFFFFF"/>
-              </a:buClr>
-              <a:buSzPct val="75000"/>
-              <a:buFont typeface="Symbol" charset="2"/>
-              <a:buChar char=""/>
-              <a:defRPr lang="en-US" sz="2800" b="0" u="none" strike="noStrike">
-                <a:solidFill>
-                  <a:srgbClr val="FFFFFF"/>
-                </a:solidFill>
-                <a:effectLst/>
-                <a:uFillTx/>
-                <a:latin typeface="Arial"/>
-              </a:defRPr>
-            </a:lvl2pPr>
-            <a:lvl3pPr lvl="2" algn="l">
-              <a:spcBef>
-                <a:spcPts val="850"/>
-              </a:spcBef>
-              <a:buClr>
-                <a:srgbClr val="FFFFFF"/>
-              </a:buClr>
-              <a:buSzPct val="45000"/>
-              <a:buFont typeface="Wingdings" charset="2"/>
-              <a:buChar char=""/>
-              <a:defRPr lang="en-US" sz="2400" b="0" u="none" strike="noStrike">
-                <a:solidFill>
-                  <a:srgbClr val="FFFFFF"/>
-                </a:solidFill>
-                <a:effectLst/>
-                <a:uFillTx/>
-                <a:latin typeface="Arial"/>
-              </a:defRPr>
-            </a:lvl3pPr>
-            <a:lvl4pPr lvl="3" algn="l">
-              <a:spcBef>
-                <a:spcPts val="567"/>
-              </a:spcBef>
-              <a:buClr>
-                <a:srgbClr val="FFFFFF"/>
-              </a:buClr>
-              <a:buSzPct val="75000"/>
-              <a:buFont typeface="Symbol" charset="2"/>
-              <a:buChar char=""/>
-              <a:defRPr lang="en-US" sz="2000" b="0" u="none" strike="noStrike">
-                <a:solidFill>
-                  <a:srgbClr val="FFFFFF"/>
-                </a:solidFill>
-                <a:effectLst/>
-                <a:uFillTx/>
-                <a:latin typeface="Arial"/>
-              </a:defRPr>
-            </a:lvl4pPr>
-            <a:lvl5pPr lvl="4" algn="l">
-              <a:spcBef>
-                <a:spcPts val="283"/>
-              </a:spcBef>
-              <a:buClr>
-                <a:srgbClr val="FFFFFF"/>
-              </a:buClr>
-              <a:buSzPct val="45000"/>
-              <a:buFont typeface="Wingdings" charset="2"/>
-              <a:buChar char=""/>
-              <a:defRPr lang="en-US" sz="2000" b="0" u="none" strike="noStrike">
-                <a:solidFill>
-                  <a:srgbClr val="FFFFFF"/>
-                </a:solidFill>
-                <a:effectLst/>
-                <a:uFillTx/>
-                <a:latin typeface="Arial"/>
-              </a:defRPr>
-            </a:lvl5pPr>
-            <a:lvl6pPr lvl="5" algn="l">
-              <a:spcBef>
-                <a:spcPts val="283"/>
-              </a:spcBef>
-              <a:buClr>
-                <a:srgbClr val="FFFFFF"/>
-              </a:buClr>
-              <a:buSzPct val="45000"/>
-              <a:buFont typeface="Wingdings" charset="2"/>
-              <a:buChar char=""/>
-              <a:defRPr lang="en-US" sz="2000" b="0" u="none" strike="noStrike">
-                <a:solidFill>
-                  <a:srgbClr val="FFFFFF"/>
-                </a:solidFill>
-                <a:effectLst/>
-                <a:uFillTx/>
-                <a:latin typeface="Arial"/>
-              </a:defRPr>
-            </a:lvl6pPr>
-            <a:lvl7pPr lvl="6" algn="l">
-              <a:spcBef>
-                <a:spcPts val="283"/>
-              </a:spcBef>
-              <a:buClr>
-                <a:srgbClr val="FFFFFF"/>
-              </a:buClr>
-              <a:buSzPct val="45000"/>
-              <a:buFont typeface="Wingdings" charset="2"/>
-              <a:buChar char=""/>
-              <a:defRPr lang="en-US" sz="2000" b="0" u="none" strike="noStrike">
-                <a:solidFill>
-                  <a:srgbClr val="FFFFFF"/>
-                </a:solidFill>
-                <a:effectLst/>
-                <a:uFillTx/>
-                <a:latin typeface="Arial"/>
-              </a:defRPr>
-            </a:lvl7pPr>
           </a:lstStyle>
           <a:p>
-            <a:pPr marL="432000" indent="-324000" algn="l">
-              <a:spcBef>
-                <a:spcPts val="1417"/>
-              </a:spcBef>
-              <a:buClr>
-                <a:srgbClr val="FFFFFF"/>
-              </a:buClr>
-              <a:buSzPct val="45000"/>
-              <a:buFont typeface="Wingdings" charset="2"/>
-              <a:buChar char=""/>
+            <a:pPr indent="0" algn="ctr">
+              <a:lnSpc>
+                <a:spcPct val="100000"/>
+              </a:lnSpc>
+              <a:buNone/>
+              <a:tabLst>
+                <a:tab pos="0" algn="l"/>
+              </a:tabLst>
             </a:pPr>
             <a:r>
-              <a:rPr lang="en-US" sz="3200" b="0" u="none" strike="noStrike">
+              <a:rPr lang="en-US" sz="1400" b="0" u="none" strike="noStrike">
                 <a:solidFill>
                   <a:srgbClr val="FFFFFF"/>
                 </a:solidFill>
                 <a:effectLst/>
                 <a:uFillTx/>
-                <a:latin typeface="Arial"/>
+                <a:latin typeface="Times New Roman"/>
               </a:rPr>
-              <a:t>Click to edit the outline text format</a:t>
+              <a:t>&lt;footer&gt;</a:t>
             </a:r>
-            <a:endParaRPr lang="en-US" sz="3200" b="0" u="none" strike="noStrike">
+            <a:endParaRPr lang="en-US" sz="1400" b="0" u="none" strike="noStrike">
               <a:solidFill>
-                <a:srgbClr val="FFFFFF"/>
+                <a:srgbClr val="000000"/>
               </a:solidFill>
               <a:effectLst/>
               <a:uFillTx/>
-              <a:latin typeface="Arial"/>
+              <a:latin typeface="Times New Roman"/>
             </a:endParaRPr>
           </a:p>
-          <a:p>
-            <a:pPr marL="864000" lvl="1" indent="-324000" algn="l">
-              <a:spcBef>
-                <a:spcPts val="1134"/>
-              </a:spcBef>
-              <a:buClr>
-                <a:srgbClr val="FFFFFF"/>
-              </a:buClr>
-              <a:buSzPct val="75000"/>
-              <a:buFont typeface="Symbol" charset="2"/>
-              <a:buChar char=""/>
-            </a:pPr>
-            <a:r>
-              <a:rPr lang="en-US" sz="2800" b="0" u="none" strike="noStrike">
-                <a:solidFill>
-                  <a:srgbClr val="FFFFFF"/>
-                </a:solidFill>
-                <a:effectLst/>
-                <a:uFillTx/>
-                <a:latin typeface="Arial"/>
-              </a:rPr>
-              <a:t>Second Outline Level</a:t>
-            </a:r>
-            <a:endParaRPr lang="en-US" sz="2800" b="0" u="none" strike="noStrike">
-              <a:solidFill>
-                <a:srgbClr val="FFFFFF"/>
-              </a:solidFill>
-              <a:effectLst/>
-              <a:uFillTx/>
-              <a:latin typeface="Arial"/>
-            </a:endParaRPr>
-          </a:p>
-          <a:p>
-            <a:pPr marL="1296000" lvl="2" indent="-288000" algn="l">
-              <a:spcBef>
-                <a:spcPts val="850"/>
-              </a:spcBef>
-              <a:buClr>
-                <a:srgbClr val="FFFFFF"/>
-              </a:buClr>
-              <a:buSzPct val="45000"/>
-              <a:buFont typeface="Wingdings" charset="2"/>
-              <a:buChar char=""/>
-            </a:pPr>
-            <a:r>
-              <a:rPr lang="en-US" sz="2400" b="0" u="none" strike="noStrike">
-                <a:solidFill>
-                  <a:srgbClr val="FFFFFF"/>
-                </a:solidFill>
-                <a:effectLst/>
-                <a:uFillTx/>
-                <a:latin typeface="Arial"/>
-              </a:rPr>
-              <a:t>Third Outline Level</a:t>
-            </a:r>
-            <a:endParaRPr lang="en-US" sz="2400" b="0" u="none" strike="noStrike">
-              <a:solidFill>
-                <a:srgbClr val="FFFFFF"/>
-              </a:solidFill>
-              <a:effectLst/>
-              <a:uFillTx/>
-              <a:latin typeface="Arial"/>
-            </a:endParaRPr>
-          </a:p>
-          <a:p>
-            <a:pPr marL="1728000" lvl="3" indent="-216000" algn="l">
-              <a:spcBef>
-                <a:spcPts val="567"/>
-              </a:spcBef>
-              <a:buClr>
-                <a:srgbClr val="FFFFFF"/>
-              </a:buClr>
-              <a:buSzPct val="75000"/>
-              <a:buFont typeface="Symbol" charset="2"/>
-              <a:buChar char=""/>
-            </a:pPr>
-            <a:r>
-              <a:rPr lang="en-US" sz="2000" b="0" u="none" strike="noStrike">
-                <a:solidFill>
-                  <a:srgbClr val="FFFFFF"/>
-                </a:solidFill>
-                <a:effectLst/>
-                <a:uFillTx/>
-                <a:latin typeface="Arial"/>
-              </a:rPr>
-              <a:t>Fourth Outline Level</a:t>
-            </a:r>
-            <a:endParaRPr lang="en-US" sz="2000" b="0" u="none" strike="noStrike">
-              <a:solidFill>
-                <a:srgbClr val="FFFFFF"/>
-              </a:solidFill>
-              <a:effectLst/>
-              <a:uFillTx/>
-              <a:latin typeface="Arial"/>
-            </a:endParaRPr>
-          </a:p>
-          <a:p>
-            <a:pPr marL="2160000" lvl="4" indent="-216000" algn="l">
-              <a:spcBef>
-                <a:spcPts val="283"/>
-              </a:spcBef>
-              <a:buClr>
-                <a:srgbClr val="FFFFFF"/>
-              </a:buClr>
-              <a:buSzPct val="45000"/>
-              <a:buFont typeface="Wingdings" charset="2"/>
-              <a:buChar char=""/>
-            </a:pPr>
-            <a:r>
-              <a:rPr lang="en-US" sz="2000" b="0" u="none" strike="noStrike">
-                <a:solidFill>
-                  <a:srgbClr val="FFFFFF"/>
-                </a:solidFill>
-                <a:effectLst/>
-                <a:uFillTx/>
-                <a:latin typeface="Arial"/>
-              </a:rPr>
-              <a:t>Fifth Outline Level</a:t>
-            </a:r>
-            <a:endParaRPr lang="en-US" sz="2000" b="0" u="none" strike="noStrike">
-              <a:solidFill>
-                <a:srgbClr val="FFFFFF"/>
-              </a:solidFill>
-              <a:effectLst/>
-              <a:uFillTx/>
-              <a:latin typeface="Arial"/>
-            </a:endParaRPr>
-          </a:p>
-          <a:p>
-            <a:pPr marL="2592000" lvl="5" indent="-216000" algn="l">
-              <a:spcBef>
-                <a:spcPts val="283"/>
-              </a:spcBef>
-              <a:buClr>
-                <a:srgbClr val="FFFFFF"/>
-              </a:buClr>
-              <a:buSzPct val="45000"/>
-              <a:buFont typeface="Wingdings" charset="2"/>
-              <a:buChar char=""/>
-            </a:pPr>
-            <a:r>
-              <a:rPr lang="en-US" sz="2000" b="0" u="none" strike="noStrike">
-                <a:solidFill>
-                  <a:srgbClr val="FFFFFF"/>
-                </a:solidFill>
-                <a:effectLst/>
-                <a:uFillTx/>
-                <a:latin typeface="Arial"/>
-              </a:rPr>
-              <a:t>Sixth Outline Level</a:t>
-            </a:r>
-            <a:endParaRPr lang="en-US" sz="2000" b="0" u="none" strike="noStrike">
-              <a:solidFill>
-                <a:srgbClr val="FFFFFF"/>
-              </a:solidFill>
-              <a:effectLst/>
-              <a:uFillTx/>
-              <a:latin typeface="Arial"/>
-            </a:endParaRPr>
-          </a:p>
-          <a:p>
-            <a:pPr marL="3024000" lvl="6" indent="-216000" algn="l">
-              <a:spcBef>
-                <a:spcPts val="283"/>
-              </a:spcBef>
-              <a:buClr>
-                <a:srgbClr val="FFFFFF"/>
-              </a:buClr>
-              <a:buSzPct val="45000"/>
-              <a:buFont typeface="Wingdings" charset="2"/>
-              <a:buChar char=""/>
-            </a:pPr>
-            <a:r>
-              <a:rPr lang="en-US" sz="2000" b="0" u="none" strike="noStrike">
-                <a:solidFill>
-                  <a:srgbClr val="FFFFFF"/>
-                </a:solidFill>
-                <a:effectLst/>
-                <a:uFillTx/>
-                <a:latin typeface="Arial"/>
-              </a:rPr>
-              <a:t>Seventh Outline Level</a:t>
-            </a:r>
-            <a:endParaRPr lang="en-US" sz="2000" b="0" u="none" strike="noStrike">
-              <a:solidFill>
-                <a:srgbClr val="FFFFFF"/>
-              </a:solidFill>
-              <a:effectLst/>
-              <a:uFillTx/>
-              <a:latin typeface="Arial"/>
-            </a:endParaRPr>
-          </a:p>
         </p:txBody>
       </p:sp>
       <p:sp>
@@ -660,13 +359,13 @@
             <a:spLocks noGrp="1"/>
           </p:cNvSpPr>
           <p:nvPr>
-            <p:ph type="dt" idx="1"/>
+            <p:ph type="sldNum" idx="2"/>
           </p:nvPr>
         </p:nvSpPr>
         <p:spPr>
           <a:xfrm>
-            <a:off x="504000" y="5165280"/>
-            <a:ext cx="2348280" cy="390600"/>
+            <a:off x="7227360" y="5165280"/>
+            <a:ext cx="2347920" cy="390240"/>
           </a:xfrm>
           <a:prstGeom prst="rect">
             <a:avLst/>
@@ -681,8 +380,14 @@
             <a:noAutofit/>
           </a:bodyPr>
           <a:lstStyle>
-            <a:lvl1pPr indent="0" algn="l">
-              <a:buNone/>
+            <a:lvl1pPr indent="0" algn="r">
+              <a:lnSpc>
+                <a:spcPct val="100000"/>
+              </a:lnSpc>
+              <a:buNone/>
+              <a:tabLst>
+                <a:tab pos="0" algn="l"/>
+              </a:tabLst>
               <a:defRPr lang="en-US" sz="1400" b="0" u="none" strike="noStrike">
                 <a:solidFill>
                   <a:srgbClr val="FFFFFF"/>
@@ -694,10 +399,16 @@
             </a:lvl1pPr>
           </a:lstStyle>
           <a:p>
-            <a:pPr indent="0" algn="l">
-              <a:buNone/>
+            <a:pPr indent="0" algn="r">
+              <a:lnSpc>
+                <a:spcPct val="100000"/>
+              </a:lnSpc>
+              <a:buNone/>
+              <a:tabLst>
+                <a:tab pos="0" algn="l"/>
+              </a:tabLst>
             </a:pPr>
-            <a:r>
+            <a:fld id="{3D8C2C3A-4212-4B6E-96DF-8AC0AECC3A52}" type="slidenum">
               <a:rPr lang="en-US" sz="1400" b="0" u="none" strike="noStrike">
                 <a:solidFill>
                   <a:srgbClr val="FFFFFF"/>
@@ -706,11 +417,11 @@
                 <a:uFillTx/>
                 <a:latin typeface="Times New Roman"/>
               </a:rPr>
-              <a:t>&lt;date/time&gt;</a:t>
-            </a:r>
+              <a:t>&lt;number&gt;</a:t>
+            </a:fld>
             <a:endParaRPr lang="en-US" sz="1400" b="0" u="none" strike="noStrike">
               <a:solidFill>
-                <a:srgbClr val="FFFFFF"/>
+                <a:srgbClr val="000000"/>
               </a:solidFill>
               <a:effectLst/>
               <a:uFillTx/>
@@ -726,13 +437,13 @@
             <a:spLocks noGrp="1"/>
           </p:cNvSpPr>
           <p:nvPr>
-            <p:ph type="ftr" idx="2"/>
+            <p:ph type="dt" idx="3"/>
           </p:nvPr>
         </p:nvSpPr>
         <p:spPr>
           <a:xfrm>
-            <a:off x="3447360" y="5165280"/>
-            <a:ext cx="3195000" cy="390600"/>
+            <a:off x="504000" y="5165280"/>
+            <a:ext cx="2347920" cy="390240"/>
           </a:xfrm>
           <a:prstGeom prst="rect">
             <a:avLst/>
@@ -747,11 +458,11 @@
             <a:noAutofit/>
           </a:bodyPr>
           <a:lstStyle>
-            <a:lvl1pPr indent="0" algn="ctr">
+            <a:lvl1pPr indent="0" algn="l">
               <a:buNone/>
               <a:defRPr lang="en-US" sz="1400" b="0" u="none" strike="noStrike">
                 <a:solidFill>
-                  <a:srgbClr val="FFFFFF"/>
+                  <a:srgbClr val="000000"/>
                 </a:solidFill>
                 <a:effectLst/>
                 <a:uFillTx/>
@@ -760,89 +471,23 @@
             </a:lvl1pPr>
           </a:lstStyle>
           <a:p>
-            <a:pPr indent="0" algn="ctr">
+            <a:pPr indent="0" algn="l">
               <a:buNone/>
             </a:pPr>
             <a:r>
               <a:rPr lang="en-US" sz="1400" b="0" u="none" strike="noStrike">
                 <a:solidFill>
-                  <a:srgbClr val="FFFFFF"/>
+                  <a:srgbClr val="000000"/>
                 </a:solidFill>
                 <a:effectLst/>
                 <a:uFillTx/>
                 <a:latin typeface="Times New Roman"/>
               </a:rPr>
-              <a:t>&lt;footer&gt;</a:t>
+              <a:t>&lt;date/time&gt;</a:t>
             </a:r>
             <a:endParaRPr lang="en-US" sz="1400" b="0" u="none" strike="noStrike">
               <a:solidFill>
-                <a:srgbClr val="FFFFFF"/>
-              </a:solidFill>
-              <a:effectLst/>
-              <a:uFillTx/>
-              <a:latin typeface="Times New Roman"/>
-            </a:endParaRPr>
-          </a:p>
-        </p:txBody>
-      </p:sp>
-      <p:sp>
-        <p:nvSpPr>
-          <p:cNvPr id="6" name="PlaceHolder 5"/>
-          <p:cNvSpPr>
-            <a:spLocks noGrp="1"/>
-          </p:cNvSpPr>
-          <p:nvPr>
-            <p:ph type="sldNum" idx="3"/>
-          </p:nvPr>
-        </p:nvSpPr>
-        <p:spPr>
-          <a:xfrm>
-            <a:off x="7227360" y="5165280"/>
-            <a:ext cx="2348280" cy="390600"/>
-          </a:xfrm>
-          <a:prstGeom prst="rect">
-            <a:avLst/>
-          </a:prstGeom>
-          <a:noFill/>
-          <a:ln w="0">
-            <a:noFill/>
-          </a:ln>
-        </p:spPr>
-        <p:txBody>
-          <a:bodyPr lIns="0" tIns="0" rIns="0" bIns="0" anchor="t">
-            <a:noAutofit/>
-          </a:bodyPr>
-          <a:lstStyle>
-            <a:lvl1pPr indent="0" algn="r">
-              <a:buNone/>
-              <a:defRPr lang="en-US" sz="1400" b="0" u="none" strike="noStrike">
-                <a:solidFill>
-                  <a:srgbClr val="FFFFFF"/>
-                </a:solidFill>
-                <a:effectLst/>
-                <a:uFillTx/>
-                <a:latin typeface="Times New Roman"/>
-              </a:defRPr>
-            </a:lvl1pPr>
-          </a:lstStyle>
-          <a:p>
-            <a:pPr indent="0" algn="r">
-              <a:buNone/>
-            </a:pPr>
-            <a:fld id="{3E7E45A2-66F0-4410-BBB4-FFA2D747409A}" type="slidenum">
-              <a:rPr lang="en-US" sz="1400" b="0" u="none" strike="noStrike">
-                <a:solidFill>
-                  <a:srgbClr val="FFFFFF"/>
-                </a:solidFill>
-                <a:effectLst/>
-                <a:uFillTx/>
-                <a:latin typeface="Times New Roman"/>
-              </a:rPr>
-              <a:t>&lt;number&gt;</a:t>
-            </a:fld>
-            <a:endParaRPr lang="en-US" sz="1400" b="0" u="none" strike="noStrike">
-              <a:solidFill>
-                <a:srgbClr val="FFFFFF"/>
+                <a:srgbClr val="000000"/>
               </a:solidFill>
               <a:effectLst/>
               <a:uFillTx/>
@@ -879,7 +524,7 @@
       </p:grpSpPr>
       <p:sp>
         <p:nvSpPr>
-          <p:cNvPr id="9" name="PlaceHolder 1"/>
+          <p:cNvPr id="8" name="PlaceHolder 1"/>
           <p:cNvSpPr>
             <a:spLocks noGrp="1"/>
           </p:cNvSpPr>
@@ -889,8 +534,8 @@
         </p:nvSpPr>
         <p:spPr>
           <a:xfrm>
-            <a:off x="504000" y="226080"/>
-            <a:ext cx="9071640" cy="946440"/>
+            <a:off x="504000" y="225720"/>
+            <a:ext cx="9071280" cy="946800"/>
           </a:xfrm>
           <a:prstGeom prst="rect">
             <a:avLst/>
@@ -906,12 +551,18 @@
           </a:bodyPr>
           <a:p>
             <a:pPr indent="0" algn="ctr">
-              <a:buNone/>
+              <a:lnSpc>
+                <a:spcPct val="100000"/>
+              </a:lnSpc>
+              <a:buNone/>
+              <a:tabLst>
+                <a:tab pos="0" algn="l"/>
+              </a:tabLst>
             </a:pPr>
             <a:r>
               <a:rPr lang="en-US" sz="4400" b="0" u="none" strike="noStrike">
                 <a:solidFill>
-                  <a:srgbClr val="FFFFFF"/>
+                  <a:srgbClr val="000000"/>
                 </a:solidFill>
                 <a:effectLst/>
                 <a:uFillTx/>
@@ -921,7 +572,7 @@
             </a:r>
             <a:endParaRPr lang="en-US" sz="4400" b="0" u="none" strike="noStrike">
               <a:solidFill>
-                <a:srgbClr val="FFFFFF"/>
+                <a:srgbClr val="000000"/>
               </a:solidFill>
               <a:effectLst/>
               <a:uFillTx/>
@@ -932,7 +583,7 @@
       </p:sp>
       <p:sp>
         <p:nvSpPr>
-          <p:cNvPr id="10" name="PlaceHolder 2"/>
+          <p:cNvPr id="9" name="PlaceHolder 2"/>
           <p:cNvSpPr>
             <a:spLocks noGrp="1"/>
           </p:cNvSpPr>
@@ -942,8 +593,8 @@
         </p:nvSpPr>
         <p:spPr>
           <a:xfrm>
-            <a:off x="504000" y="1326600"/>
-            <a:ext cx="9071640" cy="3288240"/>
+            <a:off x="504000" y="1326240"/>
+            <a:ext cx="9071280" cy="3288600"/>
           </a:xfrm>
           <a:prstGeom prst="rect">
             <a:avLst/>
@@ -959,12 +610,21 @@
           </a:bodyPr>
           <a:p>
             <a:pPr indent="0" algn="ctr">
-              <a:buNone/>
+              <a:lnSpc>
+                <a:spcPct val="100000"/>
+              </a:lnSpc>
+              <a:spcBef>
+                <a:spcPts val="1417"/>
+              </a:spcBef>
+              <a:buNone/>
+              <a:tabLst>
+                <a:tab pos="0" algn="l"/>
+              </a:tabLst>
             </a:pPr>
             <a:r>
               <a:rPr lang="en-US" sz="3200" b="0" u="none" strike="noStrike">
                 <a:solidFill>
-                  <a:srgbClr val="FFFFFF"/>
+                  <a:srgbClr val="000000"/>
                 </a:solidFill>
                 <a:effectLst/>
                 <a:uFillTx/>
@@ -974,7 +634,7 @@
             </a:r>
             <a:endParaRPr lang="en-US" sz="3200" b="0" u="none" strike="noStrike">
               <a:solidFill>
-                <a:srgbClr val="FFFFFF"/>
+                <a:srgbClr val="000000"/>
               </a:solidFill>
               <a:effectLst/>
               <a:uFillTx/>
